--- a/lecture_4/Lecture_4.pptx
+++ b/lecture_4/Lecture_4.pptx
@@ -3297,7 +3297,7 @@
             <a:fld id="{B61BEF0D-F0BB-DE4B-95CE-6DB70DBA9567}" type="datetimeFigureOut">
               <a:rPr lang="en-US" dirty="0"/>
               <a:pPr/>
-              <a:t>12/27/2021</a:t>
+              <a:t>12/28/2021</a:t>
             </a:fld>
             <a:endParaRPr lang="en-US" dirty="0"/>
           </a:p>
@@ -3590,7 +3590,7 @@
             <a:fld id="{B61BEF0D-F0BB-DE4B-95CE-6DB70DBA9567}" type="datetimeFigureOut">
               <a:rPr lang="en-US" dirty="0"/>
               <a:pPr/>
-              <a:t>12/27/2021</a:t>
+              <a:t>12/28/2021</a:t>
             </a:fld>
             <a:endParaRPr lang="en-US" dirty="0"/>
           </a:p>
@@ -3839,7 +3839,7 @@
             <a:fld id="{B61BEF0D-F0BB-DE4B-95CE-6DB70DBA9567}" type="datetimeFigureOut">
               <a:rPr lang="en-US" dirty="0"/>
               <a:pPr/>
-              <a:t>12/27/2021</a:t>
+              <a:t>12/28/2021</a:t>
             </a:fld>
             <a:endParaRPr lang="en-US" dirty="0"/>
           </a:p>
@@ -4380,7 +4380,7 @@
             <a:fld id="{B61BEF0D-F0BB-DE4B-95CE-6DB70DBA9567}" type="datetimeFigureOut">
               <a:rPr lang="en-US" dirty="0"/>
               <a:pPr/>
-              <a:t>12/27/2021</a:t>
+              <a:t>12/28/2021</a:t>
             </a:fld>
             <a:endParaRPr lang="en-US" dirty="0"/>
           </a:p>
@@ -4629,7 +4629,7 @@
             <a:fld id="{B61BEF0D-F0BB-DE4B-95CE-6DB70DBA9567}" type="datetimeFigureOut">
               <a:rPr lang="en-US" dirty="0"/>
               <a:pPr/>
-              <a:t>12/27/2021</a:t>
+              <a:t>12/28/2021</a:t>
             </a:fld>
             <a:endParaRPr lang="en-US" dirty="0"/>
           </a:p>
@@ -5162,7 +5162,7 @@
             <a:fld id="{B61BEF0D-F0BB-DE4B-95CE-6DB70DBA9567}" type="datetimeFigureOut">
               <a:rPr lang="en-US" dirty="0"/>
               <a:pPr/>
-              <a:t>12/27/2021</a:t>
+              <a:t>12/28/2021</a:t>
             </a:fld>
             <a:endParaRPr lang="en-US" dirty="0"/>
           </a:p>
@@ -5460,7 +5460,7 @@
             <a:fld id="{B61BEF0D-F0BB-DE4B-95CE-6DB70DBA9567}" type="datetimeFigureOut">
               <a:rPr lang="en-US" dirty="0"/>
               <a:pPr/>
-              <a:t>12/27/2021</a:t>
+              <a:t>12/28/2021</a:t>
             </a:fld>
             <a:endParaRPr lang="en-US" dirty="0"/>
           </a:p>
@@ -5634,7 +5634,7 @@
             <a:fld id="{B61BEF0D-F0BB-DE4B-95CE-6DB70DBA9567}" type="datetimeFigureOut">
               <a:rPr lang="en-US" dirty="0"/>
               <a:pPr/>
-              <a:t>12/27/2021</a:t>
+              <a:t>12/28/2021</a:t>
             </a:fld>
             <a:endParaRPr lang="en-US" dirty="0"/>
           </a:p>
@@ -5814,7 +5814,7 @@
             <a:fld id="{B61BEF0D-F0BB-DE4B-95CE-6DB70DBA9567}" type="datetimeFigureOut">
               <a:rPr lang="en-US" dirty="0"/>
               <a:pPr/>
-              <a:t>12/27/2021</a:t>
+              <a:t>12/28/2021</a:t>
             </a:fld>
             <a:endParaRPr lang="en-US" dirty="0"/>
           </a:p>
@@ -5984,7 +5984,7 @@
             <a:fld id="{B61BEF0D-F0BB-DE4B-95CE-6DB70DBA9567}" type="datetimeFigureOut">
               <a:rPr lang="en-US" dirty="0"/>
               <a:pPr/>
-              <a:t>12/27/2021</a:t>
+              <a:t>12/28/2021</a:t>
             </a:fld>
             <a:endParaRPr lang="en-US" dirty="0"/>
           </a:p>
@@ -6236,7 +6236,7 @@
             <a:fld id="{B61BEF0D-F0BB-DE4B-95CE-6DB70DBA9567}" type="datetimeFigureOut">
               <a:rPr lang="en-US" dirty="0"/>
               <a:pPr/>
-              <a:t>12/27/2021</a:t>
+              <a:t>12/28/2021</a:t>
             </a:fld>
             <a:endParaRPr lang="en-US" dirty="0"/>
           </a:p>
@@ -6532,7 +6532,7 @@
             <a:fld id="{B61BEF0D-F0BB-DE4B-95CE-6DB70DBA9567}" type="datetimeFigureOut">
               <a:rPr lang="en-US" dirty="0"/>
               <a:pPr/>
-              <a:t>12/27/2021</a:t>
+              <a:t>12/28/2021</a:t>
             </a:fld>
             <a:endParaRPr lang="en-US" dirty="0"/>
           </a:p>
@@ -6973,7 +6973,7 @@
             <a:fld id="{B61BEF0D-F0BB-DE4B-95CE-6DB70DBA9567}" type="datetimeFigureOut">
               <a:rPr lang="en-US" dirty="0"/>
               <a:pPr/>
-              <a:t>12/27/2021</a:t>
+              <a:t>12/28/2021</a:t>
             </a:fld>
             <a:endParaRPr lang="en-US" dirty="0"/>
           </a:p>
@@ -7092,7 +7092,7 @@
             <a:fld id="{B61BEF0D-F0BB-DE4B-95CE-6DB70DBA9567}" type="datetimeFigureOut">
               <a:rPr lang="en-US" dirty="0"/>
               <a:pPr/>
-              <a:t>12/27/2021</a:t>
+              <a:t>12/28/2021</a:t>
             </a:fld>
             <a:endParaRPr lang="en-US" dirty="0"/>
           </a:p>
@@ -7189,7 +7189,7 @@
             <a:fld id="{B61BEF0D-F0BB-DE4B-95CE-6DB70DBA9567}" type="datetimeFigureOut">
               <a:rPr lang="en-US" dirty="0"/>
               <a:pPr/>
-              <a:t>12/27/2021</a:t>
+              <a:t>12/28/2021</a:t>
             </a:fld>
             <a:endParaRPr lang="en-US" dirty="0"/>
           </a:p>
@@ -7472,7 +7472,7 @@
             <a:fld id="{B61BEF0D-F0BB-DE4B-95CE-6DB70DBA9567}" type="datetimeFigureOut">
               <a:rPr lang="en-US" dirty="0"/>
               <a:pPr/>
-              <a:t>12/27/2021</a:t>
+              <a:t>12/28/2021</a:t>
             </a:fld>
             <a:endParaRPr lang="en-US" dirty="0"/>
           </a:p>
@@ -7760,7 +7760,7 @@
             <a:fld id="{B61BEF0D-F0BB-DE4B-95CE-6DB70DBA9567}" type="datetimeFigureOut">
               <a:rPr lang="en-US" dirty="0"/>
               <a:pPr/>
-              <a:t>12/27/2021</a:t>
+              <a:t>12/28/2021</a:t>
             </a:fld>
             <a:endParaRPr lang="en-US" dirty="0"/>
           </a:p>
@@ -8290,7 +8290,7 @@
             <a:fld id="{B61BEF0D-F0BB-DE4B-95CE-6DB70DBA9567}" type="datetimeFigureOut">
               <a:rPr lang="en-US" dirty="0"/>
               <a:pPr/>
-              <a:t>12/27/2021</a:t>
+              <a:t>12/28/2021</a:t>
             </a:fld>
             <a:endParaRPr lang="en-US" dirty="0"/>
           </a:p>
@@ -12605,7 +12605,7 @@
         </p:nvSpPr>
         <p:spPr>
           <a:xfrm>
-            <a:off x="1264228" y="49933"/>
+            <a:off x="1264228" y="41085"/>
             <a:ext cx="9663544" cy="1385453"/>
           </a:xfrm>
           <a:prstGeom prst="rect">
@@ -13791,7 +13791,21 @@
                 <a:ea typeface="+mn-lt"/>
                 <a:cs typeface="+mn-lt"/>
               </a:rPr>
-              <a:t>Design a change-counting game that gets the user to enter the number of coins required to make exactly one dollar. </a:t>
+              <a:t>Design a </a:t>
+            </a:r>
+            <a:r>
+              <a:rPr lang="en-US">
+                <a:ea typeface="+mn-lt"/>
+                <a:cs typeface="+mn-lt"/>
+              </a:rPr>
+              <a:t>change-counting game </a:t>
+            </a:r>
+            <a:r>
+              <a:rPr lang="en-US" dirty="0">
+                <a:ea typeface="+mn-lt"/>
+                <a:cs typeface="+mn-lt"/>
+              </a:rPr>
+              <a:t>that gets the user to enter the number of coins required to make exactly one dollar. </a:t>
             </a:r>
           </a:p>
           <a:p>
